--- a/assets/fiches/E6-fiche-1h.pptx
+++ b/assets/fiches/E6-fiche-1h.pptx
@@ -5765,7 +5765,7 @@
           <p:nvPr/>
         </p:nvGraphicFramePr>
         <p:xfrm>
-          <a:off x="-10000000" y="7868790"/>
+          <a:off x="533400" y="7868790"/>
           <a:ext cx="6457950" cy="1663063"/>
         </p:xfrm>
         <a:graphic>
@@ -6051,27 +6051,7 @@
                           <a:latin typeface="Arial"/>
                           <a:cs typeface="Arial"/>
                         </a:rPr>
-                        <a:t>15</a:t>
-                      </a:r>
-                      <a:r>
-                        <a:rPr sz="850" b="1" spc="-10" dirty="0">
-                          <a:solidFill>
-                            <a:srgbClr val="E67D21"/>
-                          </a:solidFill>
-                          <a:latin typeface="Arial"/>
-                          <a:cs typeface="Arial"/>
-                        </a:rPr>
-                        <a:t> </a:t>
-                      </a:r>
-                      <a:r>
-                        <a:rPr sz="850" b="1" spc="-25" dirty="0">
-                          <a:solidFill>
-                            <a:srgbClr val="E67D21"/>
-                          </a:solidFill>
-                          <a:latin typeface="Arial"/>
-                          <a:cs typeface="Arial"/>
-                        </a:rPr>
-                        <a:t>min</a:t>
+                        <a:t>8 min</a:t>
                       </a:r>
                       <a:endParaRPr sz="850">
                         <a:latin typeface="Arial"/>
@@ -6092,7 +6072,7 @@
                           <a:latin typeface="Arial"/>
                           <a:cs typeface="Arial"/>
                         </a:rPr>
-                        <a:t>Teleconsultation</a:t>
+                        <a:t>Le numérique responsable en entreprise</a:t>
                       </a:r>
                       <a:endParaRPr sz="1050">
                         <a:latin typeface="Arial"/>
@@ -6121,140 +6101,17 @@
                         </a:rPr>
                         <a:t>OPT.</a:t>
                       </a:r>
-                      <a:r>
-                        <a:rPr sz="1200" b="1" baseline="13888" dirty="0">
-                          <a:solidFill>
-                            <a:srgbClr val="FFFFFF"/>
-                          </a:solidFill>
-                          <a:latin typeface="Arial"/>
-                          <a:cs typeface="Arial"/>
-                        </a:rPr>
-                        <a:t>	</a:t>
-                      </a:r>
-                      <a:r>
-                        <a:rPr sz="900" dirty="0">
-                          <a:solidFill>
-                            <a:srgbClr val="2B2B2B"/>
-                          </a:solidFill>
-                          <a:latin typeface="Arial"/>
-                          <a:cs typeface="Arial"/>
-                        </a:rPr>
-                        <a:t>.</a:t>
-                      </a:r>
-                      <a:r>
-                        <a:rPr sz="900" spc="-5" dirty="0">
-                          <a:solidFill>
-                            <a:srgbClr val="2B2B2B"/>
-                          </a:solidFill>
-                          <a:latin typeface="Arial"/>
-                          <a:cs typeface="Arial"/>
-                        </a:rPr>
-                        <a:t> </a:t>
-                      </a:r>
-                      <a:r>
-                        <a:rPr sz="900" dirty="0">
-                          <a:solidFill>
-                            <a:srgbClr val="2B2B2B"/>
-                          </a:solidFill>
-                          <a:latin typeface="Arial"/>
-                          <a:cs typeface="Arial"/>
-                        </a:rPr>
-                        <a:t>Expliquer</a:t>
-                      </a:r>
-                      <a:r>
-                        <a:rPr sz="900" spc="-5" dirty="0">
-                          <a:solidFill>
-                            <a:srgbClr val="2B2B2B"/>
-                          </a:solidFill>
-                          <a:latin typeface="Arial"/>
-                          <a:cs typeface="Arial"/>
-                        </a:rPr>
-                        <a:t> </a:t>
-                      </a:r>
-                      <a:r>
-                        <a:rPr sz="900" dirty="0">
-                          <a:solidFill>
-                            <a:srgbClr val="2B2B2B"/>
-                          </a:solidFill>
-                          <a:latin typeface="Arial"/>
-                          <a:cs typeface="Arial"/>
-                        </a:rPr>
-                        <a:t>ce qu'est</a:t>
-                      </a:r>
-                      <a:r>
-                        <a:rPr sz="900" spc="-5" dirty="0">
-                          <a:solidFill>
-                            <a:srgbClr val="2B2B2B"/>
-                          </a:solidFill>
-                          <a:latin typeface="Arial"/>
-                          <a:cs typeface="Arial"/>
-                        </a:rPr>
-                        <a:t> </a:t>
-                      </a:r>
-                      <a:r>
-                        <a:rPr sz="900" dirty="0">
-                          <a:solidFill>
-                            <a:srgbClr val="2B2B2B"/>
-                          </a:solidFill>
-                          <a:latin typeface="Arial"/>
-                          <a:cs typeface="Arial"/>
-                        </a:rPr>
-                        <a:t>la teleconsultation</a:t>
-                      </a:r>
-                      <a:r>
-                        <a:rPr sz="900" spc="-5" dirty="0">
-                          <a:solidFill>
-                            <a:srgbClr val="2B2B2B"/>
-                          </a:solidFill>
-                          <a:latin typeface="Arial"/>
-                          <a:cs typeface="Arial"/>
-                        </a:rPr>
-                        <a:t> </a:t>
-                      </a:r>
-                      <a:r>
-                        <a:rPr sz="900" dirty="0">
-                          <a:solidFill>
-                            <a:srgbClr val="2B2B2B"/>
-                          </a:solidFill>
-                          <a:latin typeface="Arial"/>
-                          <a:cs typeface="Arial"/>
-                        </a:rPr>
-                        <a:t>et</a:t>
-                      </a:r>
-                      <a:r>
-                        <a:rPr sz="900" spc="-5" dirty="0">
-                          <a:solidFill>
-                            <a:srgbClr val="2B2B2B"/>
-                          </a:solidFill>
-                          <a:latin typeface="Arial"/>
-                          <a:cs typeface="Arial"/>
-                        </a:rPr>
-                        <a:t> </a:t>
-                      </a:r>
-                      <a:r>
-                        <a:rPr sz="900" dirty="0">
-                          <a:solidFill>
-                            <a:srgbClr val="2B2B2B"/>
-                          </a:solidFill>
-                          <a:latin typeface="Arial"/>
-                          <a:cs typeface="Arial"/>
-                        </a:rPr>
-                        <a:t>son </a:t>
-                      </a:r>
-                      <a:r>
-                        <a:rPr sz="900" spc="-10" dirty="0">
-                          <a:solidFill>
-                            <a:srgbClr val="2B2B2B"/>
-                          </a:solidFill>
-                          <a:latin typeface="Arial"/>
-                          <a:cs typeface="Arial"/>
-                        </a:rPr>
-                        <a:t>remboursement</a:t>
-                      </a:r>
                       <a:endParaRPr sz="900">
                         <a:latin typeface="Arial"/>
                         <a:cs typeface="Arial"/>
                       </a:endParaRPr>
+                      <a:r>
+                        <a:rPr sz="900" spc="-30" baseline="13888" dirty="0">
+                          <a:latin typeface="Arial"/>
+                          <a:cs typeface="Arial"/>
+                        </a:rPr>
+                        <a:t>	. Intégrer le numérique responsable au sein de votre organisation permet de r…</a:t>
+                      </a:r>
                     </a:p>
                     <a:p>
                       <a:pPr marL="755650">
@@ -6270,17 +6127,7 @@
                           <a:latin typeface="Arial"/>
                           <a:cs typeface="Arial"/>
                         </a:rPr>
-                        <a:t>. Montrer comment reperer un medecin proposant la </a:t>
-                      </a:r>
-                      <a:r>
-                        <a:rPr sz="900" spc="-10" dirty="0">
-                          <a:solidFill>
-                            <a:srgbClr val="2B2B2B"/>
-                          </a:solidFill>
-                          <a:latin typeface="Arial"/>
-                          <a:cs typeface="Arial"/>
-                        </a:rPr>
-                        <a:t>video</a:t>
+                        <a:t>. Politique d'achat responsable</a:t>
                       </a:r>
                       <a:endParaRPr sz="900">
                         <a:latin typeface="Arial"/>
@@ -6301,17 +6148,7 @@
                           <a:latin typeface="Arial"/>
                           <a:cs typeface="Arial"/>
                         </a:rPr>
-                        <a:t>. Simuler la reception du lien et le demarrage de la </a:t>
-                      </a:r>
-                      <a:r>
-                        <a:rPr sz="900" spc="-10" dirty="0">
-                          <a:solidFill>
-                            <a:srgbClr val="2B2B2B"/>
-                          </a:solidFill>
-                          <a:latin typeface="Arial"/>
-                          <a:cs typeface="Arial"/>
-                        </a:rPr>
-                        <a:t>session</a:t>
+                        <a:t>. Privilégiez les équipements reconditionnés ou conçus pour durer. Demandez d…</a:t>
                       </a:r>
                       <a:endParaRPr sz="900">
                         <a:latin typeface="Arial"/>
@@ -6366,36 +6203,6 @@
                           <a:spcPts val="250"/>
                         </a:spcBef>
                       </a:pPr>
-                      <a:r>
-                        <a:rPr sz="850" b="1" dirty="0">
-                          <a:solidFill>
-                            <a:srgbClr val="E67D21"/>
-                          </a:solidFill>
-                          <a:latin typeface="Arial"/>
-                          <a:cs typeface="Arial"/>
-                        </a:rPr>
-                        <a:t>10</a:t>
-                      </a:r>
-                      <a:r>
-                        <a:rPr sz="850" b="1" spc="-10" dirty="0">
-                          <a:solidFill>
-                            <a:srgbClr val="E67D21"/>
-                          </a:solidFill>
-                          <a:latin typeface="Arial"/>
-                          <a:cs typeface="Arial"/>
-                        </a:rPr>
-                        <a:t> </a:t>
-                      </a:r>
-                      <a:r>
-                        <a:rPr sz="850" b="1" spc="-25" dirty="0">
-                          <a:solidFill>
-                            <a:srgbClr val="E67D21"/>
-                          </a:solidFill>
-                          <a:latin typeface="Arial"/>
-                          <a:cs typeface="Arial"/>
-                        </a:rPr>
-                        <a:t>min</a:t>
-                      </a:r>
                       <a:endParaRPr sz="850">
                         <a:latin typeface="Arial"/>
                         <a:cs typeface="Arial"/>
@@ -6407,76 +6214,6 @@
                           <a:spcPts val="1200"/>
                         </a:lnSpc>
                       </a:pPr>
-                      <a:r>
-                        <a:rPr sz="1050" b="1" dirty="0">
-                          <a:solidFill>
-                            <a:srgbClr val="2B2B2B"/>
-                          </a:solidFill>
-                          <a:latin typeface="Arial"/>
-                          <a:cs typeface="Arial"/>
-                        </a:rPr>
-                        <a:t>Acceder</a:t>
-                      </a:r>
-                      <a:r>
-                        <a:rPr sz="1050" b="1" spc="-25" dirty="0">
-                          <a:solidFill>
-                            <a:srgbClr val="2B2B2B"/>
-                          </a:solidFill>
-                          <a:latin typeface="Arial"/>
-                          <a:cs typeface="Arial"/>
-                        </a:rPr>
-                        <a:t> </a:t>
-                      </a:r>
-                      <a:r>
-                        <a:rPr sz="1050" b="1" dirty="0">
-                          <a:solidFill>
-                            <a:srgbClr val="2B2B2B"/>
-                          </a:solidFill>
-                          <a:latin typeface="Arial"/>
-                          <a:cs typeface="Arial"/>
-                        </a:rPr>
-                        <a:t>a</a:t>
-                      </a:r>
-                      <a:r>
-                        <a:rPr sz="1050" b="1" spc="-25" dirty="0">
-                          <a:solidFill>
-                            <a:srgbClr val="2B2B2B"/>
-                          </a:solidFill>
-                          <a:latin typeface="Arial"/>
-                          <a:cs typeface="Arial"/>
-                        </a:rPr>
-                        <a:t> </a:t>
-                      </a:r>
-                      <a:r>
-                        <a:rPr sz="1050" b="1" dirty="0">
-                          <a:solidFill>
-                            <a:srgbClr val="2B2B2B"/>
-                          </a:solidFill>
-                          <a:latin typeface="Arial"/>
-                          <a:cs typeface="Arial"/>
-                        </a:rPr>
-                        <a:t>mes</a:t>
-                      </a:r>
-                      <a:r>
-                        <a:rPr sz="1050" b="1" spc="-20" dirty="0">
-                          <a:solidFill>
-                            <a:srgbClr val="2B2B2B"/>
-                          </a:solidFill>
-                          <a:latin typeface="Arial"/>
-                          <a:cs typeface="Arial"/>
-                        </a:rPr>
-                        <a:t> </a:t>
-                      </a:r>
-                      <a:r>
-                        <a:rPr sz="1050" b="1" spc="-10" dirty="0">
-                          <a:solidFill>
-                            <a:srgbClr val="2B2B2B"/>
-                          </a:solidFill>
-                          <a:latin typeface="Arial"/>
-                          <a:cs typeface="Arial"/>
-                        </a:rPr>
-                        <a:t>documents</a:t>
-                      </a:r>
                       <a:endParaRPr sz="1050">
                         <a:latin typeface="Arial"/>
                         <a:cs typeface="Arial"/>
@@ -6494,46 +6231,6 @@
                           <a:tab pos="524510" algn="l"/>
                         </a:tabLst>
                       </a:pPr>
-                      <a:r>
-                        <a:rPr sz="1200" b="1" spc="-30" baseline="13888" dirty="0">
-                          <a:solidFill>
-                            <a:srgbClr val="FFFFFF"/>
-                          </a:solidFill>
-                          <a:latin typeface="Arial"/>
-                          <a:cs typeface="Arial"/>
-                        </a:rPr>
-                        <a:t>OPT.</a:t>
-                      </a:r>
-                      <a:r>
-                        <a:rPr sz="1200" b="1" baseline="13888" dirty="0">
-                          <a:solidFill>
-                            <a:srgbClr val="FFFFFF"/>
-                          </a:solidFill>
-                          <a:latin typeface="Arial"/>
-                          <a:cs typeface="Arial"/>
-                        </a:rPr>
-                        <a:t>	</a:t>
-                      </a:r>
-                      <a:r>
-                        <a:rPr sz="900" dirty="0">
-                          <a:solidFill>
-                            <a:srgbClr val="2B2B2B"/>
-                          </a:solidFill>
-                          <a:latin typeface="Arial"/>
-                          <a:cs typeface="Arial"/>
-                        </a:rPr>
-                        <a:t>. Naviguer vers Mon espace sante &gt; Mes </a:t>
-                      </a:r>
-                      <a:r>
-                        <a:rPr sz="900" spc="-10" dirty="0">
-                          <a:solidFill>
-                            <a:srgbClr val="2B2B2B"/>
-                          </a:solidFill>
-                          <a:latin typeface="Arial"/>
-                          <a:cs typeface="Arial"/>
-                        </a:rPr>
-                        <a:t>documents</a:t>
-                      </a:r>
                       <a:endParaRPr sz="900">
                         <a:latin typeface="Arial"/>
                         <a:cs typeface="Arial"/>
@@ -6545,26 +6242,6 @@
                           <a:spcPts val="1050"/>
                         </a:lnSpc>
                       </a:pPr>
-                      <a:r>
-                        <a:rPr sz="900" dirty="0">
-                          <a:solidFill>
-                            <a:srgbClr val="2B2B2B"/>
-                          </a:solidFill>
-                          <a:latin typeface="Arial"/>
-                          <a:cs typeface="Arial"/>
-                        </a:rPr>
-                        <a:t>. Retrouver une ordonnance ou un resultat </a:t>
-                      </a:r>
-                      <a:r>
-                        <a:rPr sz="900" spc="-10" dirty="0">
-                          <a:solidFill>
-                            <a:srgbClr val="2B2B2B"/>
-                          </a:solidFill>
-                          <a:latin typeface="Arial"/>
-                          <a:cs typeface="Arial"/>
-                        </a:rPr>
-                        <a:t>d'analyse</a:t>
-                      </a:r>
                       <a:endParaRPr sz="900">
                         <a:latin typeface="Arial"/>
                         <a:cs typeface="Arial"/>
@@ -6576,26 +6253,6 @@
                           <a:spcPts val="885"/>
                         </a:lnSpc>
                       </a:pPr>
-                      <a:r>
-                        <a:rPr sz="900" dirty="0">
-                          <a:solidFill>
-                            <a:srgbClr val="2B2B2B"/>
-                          </a:solidFill>
-                          <a:latin typeface="Arial"/>
-                          <a:cs typeface="Arial"/>
-                        </a:rPr>
-                        <a:t>. Telecharger ou imprimer un document depuis </a:t>
-                      </a:r>
-                      <a:r>
-                        <a:rPr sz="900" spc="-10" dirty="0">
-                          <a:solidFill>
-                            <a:srgbClr val="2B2B2B"/>
-                          </a:solidFill>
-                          <a:latin typeface="Arial"/>
-                          <a:cs typeface="Arial"/>
-                        </a:rPr>
-                        <a:t>Doctolib</a:t>
-                      </a:r>
                       <a:endParaRPr sz="900">
                         <a:latin typeface="Arial"/>
                         <a:cs typeface="Arial"/>

--- a/assets/fiches/E6-fiche-1h.pptx
+++ b/assets/fiches/E6-fiche-1h.pptx
@@ -5217,7 +5217,7 @@
         <p:spPr>
           <a:xfrm>
             <a:off x="529200" y="8067599"/>
-            <a:ext cx="6498000" cy="828000"/>
+            <a:ext cx="6498000" cy="1065600"/>
           </a:xfrm>
           <a:prstGeom prst="rect">
             <a:avLst/>
@@ -5384,7 +5384,7 @@
         <p:spPr>
           <a:xfrm>
             <a:off x="637200" y="8308799"/>
-            <a:ext cx="6300000" cy="529200"/>
+            <a:ext cx="6300000" cy="766800"/>
           </a:xfrm>
           <a:prstGeom prst="rect">
             <a:avLst/>

--- a/assets/fiches/E6-fiche-1h.pptx
+++ b/assets/fiches/E6-fiche-1h.pptx
@@ -6,6 +6,7 @@
   </p:sldMasterIdLst>
   <p:sldIdLst>
     <p:sldId id="256" r:id="rId7"/>
+    <p:sldId id="257" r:id="rId8"/>
   </p:sldIdLst>
   <p:sldSz cx="7556399" cy="10692000" type="screen4x3"/>
   <p:notesSz cx="6858000" cy="9144000"/>
@@ -5208,16 +5209,42 @@
           </a:p>
         </p:txBody>
       </p:sp>
-      <p:sp>
-        <p:nvSpPr>
-          <p:cNvPr id="42" name="Rectangle 41"/>
+    </p:spTree>
+  </p:cSld>
+  <p:clrMapOvr>
+    <a:masterClrMapping/>
+  </p:clrMapOvr>
+</p:sld>
+</file>
+
+<file path=ppt/slides/slide2.xml><?xml version="1.0" encoding="utf-8"?>
+<p:sld xmlns:a="http://schemas.openxmlformats.org/drawingml/2006/main" xmlns:p="http://schemas.openxmlformats.org/presentationml/2006/main" xmlns:r="http://schemas.openxmlformats.org/officeDocument/2006/relationships">
+  <p:cSld>
+    <p:bg>
+      <p:bgPr>
+        <a:solidFill>
+          <a:srgbClr val="FFFFFF"/>
+        </a:solidFill>
+        <a:effectLst/>
+      </p:bgPr>
+    </p:bg>
+    <p:spTree>
+      <p:nvGrpSpPr>
+        <p:cNvPr id="1" name=""/>
+        <p:cNvGrpSpPr/>
+        <p:nvPr/>
+      </p:nvGrpSpPr>
+      <p:grpSpPr/>
+      <p:sp>
+        <p:nvSpPr>
+          <p:cNvPr id="2" name="Rectangle 1"/>
           <p:cNvSpPr/>
           <p:nvPr/>
         </p:nvSpPr>
         <p:spPr>
           <a:xfrm>
-            <a:off x="529200" y="8067599"/>
-            <a:ext cx="6498000" cy="1065600"/>
+            <a:off x="529200" y="540000"/>
+            <a:ext cx="6498000" cy="2728799"/>
           </a:xfrm>
           <a:prstGeom prst="rect">
             <a:avLst/>
@@ -5253,13 +5280,13 @@
       </p:sp>
       <p:sp>
         <p:nvSpPr>
-          <p:cNvPr id="43" name="Rectangle 42"/>
+          <p:cNvPr id="3" name="Rectangle 2"/>
           <p:cNvSpPr/>
           <p:nvPr/>
         </p:nvSpPr>
         <p:spPr>
           <a:xfrm>
-            <a:off x="529200" y="8067599"/>
+            <a:off x="529200" y="540000"/>
             <a:ext cx="6498000" cy="198000"/>
           </a:xfrm>
           <a:prstGeom prst="rect">
@@ -5294,13 +5321,13 @@
       </p:sp>
       <p:sp>
         <p:nvSpPr>
-          <p:cNvPr id="44" name="TextBox 43"/>
+          <p:cNvPr id="4" name="TextBox 3"/>
           <p:cNvSpPr txBox="1"/>
           <p:nvPr/>
         </p:nvSpPr>
         <p:spPr>
           <a:xfrm>
-            <a:off x="601200" y="8096399"/>
+            <a:off x="601200" y="568800"/>
             <a:ext cx="6354000" cy="162000"/>
           </a:xfrm>
           <a:prstGeom prst="rect">
@@ -5336,13 +5363,13 @@
       </p:sp>
       <p:sp>
         <p:nvSpPr>
-          <p:cNvPr id="45" name="Rectangle 44"/>
+          <p:cNvPr id="5" name="Rectangle 4"/>
           <p:cNvSpPr/>
           <p:nvPr/>
         </p:nvSpPr>
         <p:spPr>
           <a:xfrm>
-            <a:off x="529200" y="8265599"/>
+            <a:off x="529200" y="737999"/>
             <a:ext cx="6498000" cy="14400"/>
           </a:xfrm>
           <a:prstGeom prst="rect">
@@ -5377,13 +5404,13 @@
       </p:sp>
       <p:sp>
         <p:nvSpPr>
-          <p:cNvPr id="46" name="TextBox 45"/>
+          <p:cNvPr id="6" name="TextBox 5"/>
           <p:cNvSpPr txBox="1"/>
           <p:nvPr/>
         </p:nvSpPr>
         <p:spPr>
           <a:xfrm>
-            <a:off x="637200" y="8308799"/>
+            <a:off x="637200" y="781200"/>
             <a:ext cx="6300000" cy="766800"/>
           </a:xfrm>
           <a:prstGeom prst="rect">
@@ -5412,7 +5439,7 @@
                 </a:solidFill>
                 <a:latin typeface="Arial"/>
               </a:rPr>
-              <a:t>8 min</a:t>
+              <a:t>5 min</a:t>
             </a:r>
           </a:p>
           <a:p>
@@ -5431,7 +5458,7 @@
                 </a:solidFill>
                 <a:latin typeface="Arial"/>
               </a:rPr>
-              <a:t>Le numérique responsable en entreprise</a:t>
+              <a:t>Des ressources rares et précieuses</a:t>
             </a:r>
           </a:p>
           <a:p>
@@ -5459,7 +5486,7 @@
                 </a:solidFill>
                 <a:latin typeface="Arial"/>
               </a:rPr>
-              <a:t>. Intégrer le numérique responsable au sein de votre organisation permet de r…</a:t>
+              <a:t>. Derrière chaque écran, chaque circuit imprimé, se cache un monde de minerai…</a:t>
             </a:r>
           </a:p>
           <a:p>
@@ -5478,7 +5505,7 @@
                 </a:solidFill>
                 <a:latin typeface="Arial"/>
               </a:rPr>
-              <a:t>. Politique d'achat responsable</a:t>
+              <a:t>. Un cocktail de métaux stratégiques</a:t>
             </a:r>
           </a:p>
           <a:p>
@@ -5497,6 +5524,174 @@
                 </a:solidFill>
                 <a:latin typeface="Arial"/>
               </a:rPr>
+              <a:t>. Nos appareils dépendent de ressources comme le lithium (batteries), le coba…</a:t>
+            </a:r>
+          </a:p>
+        </p:txBody>
+      </p:sp>
+      <p:sp>
+        <p:nvSpPr>
+          <p:cNvPr id="7" name="Rectangle 6"/>
+          <p:cNvSpPr/>
+          <p:nvPr/>
+        </p:nvSpPr>
+        <p:spPr>
+          <a:xfrm>
+            <a:off x="529200" y="1569599"/>
+            <a:ext cx="6498000" cy="14400"/>
+          </a:xfrm>
+          <a:prstGeom prst="rect">
+            <a:avLst/>
+          </a:prstGeom>
+          <a:solidFill>
+            <a:srgbClr val="E67D21"/>
+          </a:solidFill>
+          <a:ln>
+            <a:noFill/>
+          </a:ln>
+        </p:spPr>
+        <p:style>
+          <a:lnRef idx="1">
+            <a:schemeClr val="accent1"/>
+          </a:lnRef>
+          <a:fillRef idx="3">
+            <a:schemeClr val="accent1"/>
+          </a:fillRef>
+          <a:effectRef idx="2">
+            <a:schemeClr val="accent1"/>
+          </a:effectRef>
+          <a:fontRef idx="minor">
+            <a:schemeClr val="lt1"/>
+          </a:fontRef>
+        </p:style>
+        <p:txBody>
+          <a:bodyPr rtlCol="0" anchor="ctr"/>
+          <a:lstStyle/>
+          <a:p/>
+        </p:txBody>
+      </p:sp>
+      <p:sp>
+        <p:nvSpPr>
+          <p:cNvPr id="8" name="TextBox 7"/>
+          <p:cNvSpPr txBox="1"/>
+          <p:nvPr/>
+        </p:nvSpPr>
+        <p:spPr>
+          <a:xfrm>
+            <a:off x="637200" y="1612799"/>
+            <a:ext cx="6300000" cy="766800"/>
+          </a:xfrm>
+          <a:prstGeom prst="rect">
+            <a:avLst/>
+          </a:prstGeom>
+          <a:noFill/>
+        </p:spPr>
+        <p:txBody>
+          <a:bodyPr wrap="square" tIns="0" bIns="0" lIns="18000" rIns="18000">
+            <a:spAutoFit/>
+          </a:bodyPr>
+          <a:lstStyle/>
+          <a:p>
+            <a:pPr algn="l">
+              <a:spcBef>
+                <a:spcPts val="0"/>
+              </a:spcBef>
+              <a:spcAft>
+                <a:spcPts val="100"/>
+              </a:spcAft>
+            </a:pPr>
+            <a:r>
+              <a:rPr sz="800" b="1" i="0">
+                <a:solidFill>
+                  <a:srgbClr val="E67D21"/>
+                </a:solidFill>
+                <a:latin typeface="Arial"/>
+              </a:rPr>
+              <a:t>8 min</a:t>
+            </a:r>
+          </a:p>
+          <a:p>
+            <a:pPr algn="l">
+              <a:spcBef>
+                <a:spcPts val="0"/>
+              </a:spcBef>
+              <a:spcAft>
+                <a:spcPts val="100"/>
+              </a:spcAft>
+            </a:pPr>
+            <a:r>
+              <a:rPr sz="900" b="1" i="0">
+                <a:solidFill>
+                  <a:srgbClr val="2B2B2B"/>
+                </a:solidFill>
+                <a:latin typeface="Arial"/>
+              </a:rPr>
+              <a:t>Le numérique responsable en entreprise</a:t>
+            </a:r>
+          </a:p>
+          <a:p>
+            <a:pPr>
+              <a:spcBef>
+                <a:spcPts val="0"/>
+              </a:spcBef>
+              <a:spcAft>
+                <a:spcPts val="100"/>
+              </a:spcAft>
+            </a:pPr>
+            <a:r>
+              <a:rPr sz="800" b="1">
+                <a:solidFill>
+                  <a:srgbClr val="E67D21"/>
+                </a:solidFill>
+                <a:latin typeface="Arial"/>
+              </a:rPr>
+              <a:t>OPT.  </a:t>
+            </a:r>
+            <a:r>
+              <a:rPr sz="800">
+                <a:solidFill>
+                  <a:srgbClr val="2B2B2B"/>
+                </a:solidFill>
+                <a:latin typeface="Arial"/>
+              </a:rPr>
+              <a:t>. Intégrer le numérique responsable au sein de votre organisation permet de r…</a:t>
+            </a:r>
+          </a:p>
+          <a:p>
+            <a:pPr algn="l">
+              <a:spcBef>
+                <a:spcPts val="0"/>
+              </a:spcBef>
+              <a:spcAft>
+                <a:spcPts val="100"/>
+              </a:spcAft>
+            </a:pPr>
+            <a:r>
+              <a:rPr sz="800" b="0" i="0">
+                <a:solidFill>
+                  <a:srgbClr val="2B2B2B"/>
+                </a:solidFill>
+                <a:latin typeface="Arial"/>
+              </a:rPr>
+              <a:t>. Politique d'achat responsable</a:t>
+            </a:r>
+          </a:p>
+          <a:p>
+            <a:pPr algn="l">
+              <a:spcBef>
+                <a:spcPts val="0"/>
+              </a:spcBef>
+              <a:spcAft>
+                <a:spcPts val="100"/>
+              </a:spcAft>
+            </a:pPr>
+            <a:r>
+              <a:rPr sz="800" b="0" i="0">
+                <a:solidFill>
+                  <a:srgbClr val="2B2B2B"/>
+                </a:solidFill>
+                <a:latin typeface="Arial"/>
+              </a:rPr>
               <a:t>. Privilégiez les équipements reconditionnés ou conçus pour durer. Demandez d…</a:t>
             </a:r>
           </a:p>
@@ -5504,7 +5699,175 @@
       </p:sp>
       <p:sp>
         <p:nvSpPr>
-          <p:cNvPr id="47" name="Rectangle 46"/>
+          <p:cNvPr id="9" name="Rectangle 8"/>
+          <p:cNvSpPr/>
+          <p:nvPr/>
+        </p:nvSpPr>
+        <p:spPr>
+          <a:xfrm>
+            <a:off x="529200" y="2401200"/>
+            <a:ext cx="6498000" cy="14400"/>
+          </a:xfrm>
+          <a:prstGeom prst="rect">
+            <a:avLst/>
+          </a:prstGeom>
+          <a:solidFill>
+            <a:srgbClr val="E67D21"/>
+          </a:solidFill>
+          <a:ln>
+            <a:noFill/>
+          </a:ln>
+        </p:spPr>
+        <p:style>
+          <a:lnRef idx="1">
+            <a:schemeClr val="accent1"/>
+          </a:lnRef>
+          <a:fillRef idx="3">
+            <a:schemeClr val="accent1"/>
+          </a:fillRef>
+          <a:effectRef idx="2">
+            <a:schemeClr val="accent1"/>
+          </a:effectRef>
+          <a:fontRef idx="minor">
+            <a:schemeClr val="lt1"/>
+          </a:fontRef>
+        </p:style>
+        <p:txBody>
+          <a:bodyPr rtlCol="0" anchor="ctr"/>
+          <a:lstStyle/>
+          <a:p/>
+        </p:txBody>
+      </p:sp>
+      <p:sp>
+        <p:nvSpPr>
+          <p:cNvPr id="10" name="TextBox 9"/>
+          <p:cNvSpPr txBox="1"/>
+          <p:nvPr/>
+        </p:nvSpPr>
+        <p:spPr>
+          <a:xfrm>
+            <a:off x="637200" y="2444400"/>
+            <a:ext cx="6300000" cy="766800"/>
+          </a:xfrm>
+          <a:prstGeom prst="rect">
+            <a:avLst/>
+          </a:prstGeom>
+          <a:noFill/>
+        </p:spPr>
+        <p:txBody>
+          <a:bodyPr wrap="square" tIns="0" bIns="0" lIns="18000" rIns="18000">
+            <a:spAutoFit/>
+          </a:bodyPr>
+          <a:lstStyle/>
+          <a:p>
+            <a:pPr algn="l">
+              <a:spcBef>
+                <a:spcPts val="0"/>
+              </a:spcBef>
+              <a:spcAft>
+                <a:spcPts val="100"/>
+              </a:spcAft>
+            </a:pPr>
+            <a:r>
+              <a:rPr sz="800" b="1" i="0">
+                <a:solidFill>
+                  <a:srgbClr val="E67D21"/>
+                </a:solidFill>
+                <a:latin typeface="Arial"/>
+              </a:rPr>
+              <a:t>5 min</a:t>
+            </a:r>
+          </a:p>
+          <a:p>
+            <a:pPr algn="l">
+              <a:spcBef>
+                <a:spcPts val="0"/>
+              </a:spcBef>
+              <a:spcAft>
+                <a:spcPts val="100"/>
+              </a:spcAft>
+            </a:pPr>
+            <a:r>
+              <a:rPr sz="900" b="1" i="0">
+                <a:solidFill>
+                  <a:srgbClr val="2B2B2B"/>
+                </a:solidFill>
+                <a:latin typeface="Arial"/>
+              </a:rPr>
+              <a:t>Pour aller plus loin — Sources</a:t>
+            </a:r>
+          </a:p>
+          <a:p>
+            <a:pPr>
+              <a:spcBef>
+                <a:spcPts val="0"/>
+              </a:spcBef>
+              <a:spcAft>
+                <a:spcPts val="100"/>
+              </a:spcAft>
+            </a:pPr>
+            <a:r>
+              <a:rPr sz="800" b="1">
+                <a:solidFill>
+                  <a:srgbClr val="E67D21"/>
+                </a:solidFill>
+                <a:latin typeface="Arial"/>
+              </a:rPr>
+              <a:t>OPT.  </a:t>
+            </a:r>
+            <a:r>
+              <a:rPr sz="800">
+                <a:solidFill>
+                  <a:srgbClr val="2B2B2B"/>
+                </a:solidFill>
+                <a:latin typeface="Arial"/>
+              </a:rPr>
+              <a:t>. Le numérique responsable, c'est l'affaire de tous. Chaque geste compte, cha…</a:t>
+            </a:r>
+          </a:p>
+          <a:p>
+            <a:pPr algn="l">
+              <a:spcBef>
+                <a:spcPts val="0"/>
+              </a:spcBef>
+              <a:spcAft>
+                <a:spcPts val="100"/>
+              </a:spcAft>
+            </a:pPr>
+            <a:r>
+              <a:rPr sz="800" b="0" i="0">
+                <a:solidFill>
+                  <a:srgbClr val="2B2B2B"/>
+                </a:solidFill>
+                <a:latin typeface="Arial"/>
+              </a:rPr>
+              <a:t>. ADEME-Arcep, Évaluation de l'impact environnemental du numérique en France,…</a:t>
+            </a:r>
+          </a:p>
+          <a:p>
+            <a:pPr algn="l">
+              <a:spcBef>
+                <a:spcPts val="0"/>
+              </a:spcBef>
+              <a:spcAft>
+                <a:spcPts val="100"/>
+              </a:spcAft>
+            </a:pPr>
+            <a:r>
+              <a:rPr sz="800" b="0" i="0">
+                <a:solidFill>
+                  <a:srgbClr val="2B2B2B"/>
+                </a:solidFill>
+                <a:latin typeface="Arial"/>
+              </a:rPr>
+              <a:t>. GreenIT.fr, Benchmark Green IT 2024, Novembre 2024 — greenit.fr</a:t>
+            </a:r>
+          </a:p>
+        </p:txBody>
+      </p:sp>
+      <p:sp>
+        <p:nvSpPr>
+          <p:cNvPr id="11" name="Rectangle 10"/>
           <p:cNvSpPr/>
           <p:nvPr/>
         </p:nvSpPr>
@@ -5545,7 +5908,7 @@
       </p:sp>
       <p:sp>
         <p:nvSpPr>
-          <p:cNvPr id="48" name="TextBox 47"/>
+          <p:cNvPr id="12" name="TextBox 11"/>
           <p:cNvSpPr txBox="1"/>
           <p:nvPr/>
         </p:nvSpPr>

--- a/assets/fiches/E6-fiche-1h.pptx
+++ b/assets/fiches/E6-fiche-1h.pptx
@@ -3722,7 +3722,7 @@
                 </a:solidFill>
                 <a:latin typeface="Arial"/>
               </a:rPr>
-              <a:t>. On l'oublie souvent, mais le numérique est l'un des secteurs les plus émetteurs de gaz à e…</a:t>
+              <a:t>. On l'oublie souvent, mais le numérique est l'un des secteurs les plus émetteurs de gaz à effet de serre au monde. Et sa croissance est rapide.</a:t>
             </a:r>
           </a:p>
         </p:txBody>
@@ -3969,7 +3969,7 @@
                 </a:solidFill>
                 <a:latin typeface="Arial"/>
               </a:rPr>
-              <a:t>. La fabrication de nos appareils numériques est de loin la source d'impact la plus importan…</a:t>
+              <a:t>. La fabrication de nos appareils numériques est de loin la source d'impact la plus importante — bien plus que leur utilisation quotidienne.</a:t>
             </a:r>
           </a:p>
         </p:txBody>
@@ -4463,7 +4463,7 @@
                 </a:solidFill>
                 <a:latin typeface="Arial"/>
               </a:rPr>
-              <a:t>. Ces infrastructures discrètes sont le moteur de notre monde numérique, hébergeant nos donn…</a:t>
+              <a:t>. Ces infrastructures discrètes sont le moteur de notre monde numérique, hébergeant nos données et applications. Cependant, leur fonctionnement est incroyablement gourmand en ressources, notamment pour le refroidissement des serveurs et le maintien d'une température stable.</a:t>
             </a:r>
           </a:p>
         </p:txBody>
@@ -4710,7 +4710,7 @@
                 </a:solidFill>
                 <a:latin typeface="Arial"/>
               </a:rPr>
-              <a:t>. Les Déchets d'Équipements Électriques et Électroniques (DEEE), ou "e-waste", représentent …</a:t>
+              <a:t>. Les Déchets d'Équipements Électriques et Électroniques (DEEE), ou "e-waste", représentent aujourd'hui le flux de déchets qui croît le plus rapidement dans le monde. C'est une problématique environnementale et sanitaire majeure.</a:t>
             </a:r>
           </a:p>
         </p:txBody>
@@ -4957,7 +4957,7 @@
                 </a:solidFill>
                 <a:latin typeface="Arial"/>
               </a:rPr>
-              <a:t>. L'obsolescence, qu'elle soit programmée ou perçue, est un facteur majeur de l'empreinte en…</a:t>
+              <a:t>. L'obsolescence, qu'elle soit programmée ou perçue, est un facteur majeur de l'empreinte environnementale du numérique. Elle nous pousse à renouveler nos appareils bien avant la fin de leur durée de vie potentielle.</a:t>
             </a:r>
           </a:p>
         </p:txBody>
@@ -5204,7 +5204,7 @@
                 </a:solidFill>
                 <a:latin typeface="Arial"/>
               </a:rPr>
-              <a:t>. Plutôt que de céder à l'obsolescence programmée ou perçue, adoptons des gestes simples pou…</a:t>
+              <a:t>. Plutôt que de céder à l'obsolescence programmée ou perçue, adoptons des gestes simples pour prolonger la durée de vie de nos équipements. Chaque année gagnée, c'est une réduction significative de leur empreinte environnementale.</a:t>
             </a:r>
           </a:p>
         </p:txBody>
@@ -5486,7 +5486,7 @@
                 </a:solidFill>
                 <a:latin typeface="Arial"/>
               </a:rPr>
-              <a:t>. Derrière chaque écran, chaque circuit imprimé, se cache un monde de minerai…</a:t>
+              <a:t>. Derrière chaque écran, chaque circuit imprimé, se cache un monde de minerais et de métaux rares, dont l'extraction a des conséquences environnementales et sociales souvent dramatiques.</a:t>
             </a:r>
           </a:p>
           <a:p>
@@ -5524,7 +5524,7 @@
                 </a:solidFill>
                 <a:latin typeface="Arial"/>
               </a:rPr>
-              <a:t>. Nos appareils dépendent de ressources comme le lithium (batteries), le coba…</a:t>
+              <a:t>. Nos appareils dépendent de ressources comme le lithium (batteries), le cobalt (batteries, puces), le coltan (condensateurs), l'or, l'argent, le cuivre... L'extraction de ces 70+ métaux est très énergivore et souvent localisée dans des zones politiquement instables.</a:t>
             </a:r>
           </a:p>
         </p:txBody>
@@ -5654,7 +5654,7 @@
                 </a:solidFill>
                 <a:latin typeface="Arial"/>
               </a:rPr>
-              <a:t>. Intégrer le numérique responsable au sein de votre organisation permet de r…</a:t>
+              <a:t>. Intégrer le numérique responsable au sein de votre organisation permet de réduire votre empreinte environnementale tout en optimisant vos coûts et en engageant vos équipes. Voici des pistes concrètes pour agir.</a:t>
             </a:r>
           </a:p>
           <a:p>
@@ -5692,7 +5692,7 @@
                 </a:solidFill>
                 <a:latin typeface="Arial"/>
               </a:rPr>
-              <a:t>. Privilégiez les équipements reconditionnés ou conçus pour durer. Demandez d…</a:t>
+              <a:t>. Privilégiez les équipements reconditionnés ou conçus pour durer. Demandez des garanties de réparabilité et de disponibilité des pièces détachées à vos fournisseurs.</a:t>
             </a:r>
           </a:p>
         </p:txBody>
@@ -5822,7 +5822,7 @@
                 </a:solidFill>
                 <a:latin typeface="Arial"/>
               </a:rPr>
-              <a:t>. Le numérique responsable, c'est l'affaire de tous. Chaque geste compte, cha…</a:t>
+              <a:t>. Le numérique responsable, c'est l'affaire de tous. Chaque geste compte, chaque appareil prolongé, chaque donnée nettoyée contribue à un avenir plus durable.</a:t>
             </a:r>
           </a:p>
           <a:p>
@@ -5841,7 +5841,7 @@
                 </a:solidFill>
                 <a:latin typeface="Arial"/>
               </a:rPr>
-              <a:t>. ADEME-Arcep, Évaluation de l'impact environnemental du numérique en France,…</a:t>
+              <a:t>. ADEME-Arcep, Évaluation de l'impact environnemental du numérique en France, Janvier 2025 — librairie.ademe.fr</a:t>
             </a:r>
           </a:p>
           <a:p>

--- a/assets/fiches/E6-fiche-1h.pptx
+++ b/assets/fiches/E6-fiche-1h.pptx
@@ -3097,9 +3097,35 @@
         <p:nvPr/>
       </p:nvGrpSpPr>
       <p:grpSpPr/>
-      <p:sp>
-        <p:nvSpPr>
-          <p:cNvPr id="2" name="TextBox 1"/>
+      <p:pic>
+        <p:nvPicPr>
+          <p:cNvPr id="2" name="Picture 1" descr="bg-p1.png"/>
+          <p:cNvPicPr>
+            <a:picLocks noChangeAspect="1"/>
+          </p:cNvPicPr>
+          <p:nvPr/>
+        </p:nvPicPr>
+        <p:blipFill>
+          <a:blip r:embed="rId2">
+            <a:alphaModFix amt="80000"/>
+          </a:blip>
+          <a:stretch>
+            <a:fillRect/>
+          </a:stretch>
+        </p:blipFill>
+        <p:spPr>
+          <a:xfrm>
+            <a:off x="0" y="0"/>
+            <a:ext cx="7556399" cy="10692000"/>
+          </a:xfrm>
+          <a:prstGeom prst="rect">
+            <a:avLst/>
+          </a:prstGeom>
+        </p:spPr>
+      </p:pic>
+      <p:sp>
+        <p:nvSpPr>
+          <p:cNvPr id="3" name="TextBox 2"/>
           <p:cNvSpPr txBox="1"/>
           <p:nvPr/>
         </p:nvSpPr>
@@ -3160,7 +3186,7 @@
       </p:sp>
       <p:sp>
         <p:nvSpPr>
-          <p:cNvPr id="3" name="Rectangle 2"/>
+          <p:cNvPr id="4" name="Rectangle 3"/>
           <p:cNvSpPr/>
           <p:nvPr/>
         </p:nvSpPr>
@@ -3203,7 +3229,7 @@
       </p:sp>
       <p:sp>
         <p:nvSpPr>
-          <p:cNvPr id="4" name="TextBox 3"/>
+          <p:cNvPr id="5" name="TextBox 4"/>
           <p:cNvSpPr txBox="1"/>
           <p:nvPr/>
         </p:nvSpPr>
@@ -3321,7 +3347,7 @@
       </p:sp>
       <p:sp>
         <p:nvSpPr>
-          <p:cNvPr id="5" name="Rectangle 4"/>
+          <p:cNvPr id="6" name="Rectangle 5"/>
           <p:cNvSpPr/>
           <p:nvPr/>
         </p:nvSpPr>
@@ -3364,7 +3390,7 @@
       </p:sp>
       <p:sp>
         <p:nvSpPr>
-          <p:cNvPr id="6" name="TextBox 5"/>
+          <p:cNvPr id="7" name="TextBox 6"/>
           <p:cNvSpPr txBox="1"/>
           <p:nvPr/>
         </p:nvSpPr>
@@ -3482,7 +3508,7 @@
       </p:sp>
       <p:sp>
         <p:nvSpPr>
-          <p:cNvPr id="7" name="Rectangle 6"/>
+          <p:cNvPr id="8" name="Rectangle 7"/>
           <p:cNvSpPr/>
           <p:nvPr/>
         </p:nvSpPr>
@@ -3525,7 +3551,7 @@
       </p:sp>
       <p:sp>
         <p:nvSpPr>
-          <p:cNvPr id="8" name="Rectangle 7"/>
+          <p:cNvPr id="9" name="Rectangle 8"/>
           <p:cNvSpPr/>
           <p:nvPr/>
         </p:nvSpPr>
@@ -3566,7 +3592,7 @@
       </p:sp>
       <p:sp>
         <p:nvSpPr>
-          <p:cNvPr id="9" name="Rectangle 8"/>
+          <p:cNvPr id="10" name="Rectangle 9"/>
           <p:cNvSpPr/>
           <p:nvPr/>
         </p:nvSpPr>
@@ -3607,7 +3633,7 @@
       </p:sp>
       <p:sp>
         <p:nvSpPr>
-          <p:cNvPr id="10" name="TextBox 9"/>
+          <p:cNvPr id="11" name="TextBox 10"/>
           <p:cNvSpPr txBox="1"/>
           <p:nvPr/>
         </p:nvSpPr>
@@ -3649,7 +3675,7 @@
       </p:sp>
       <p:sp>
         <p:nvSpPr>
-          <p:cNvPr id="11" name="TextBox 10"/>
+          <p:cNvPr id="12" name="TextBox 11"/>
           <p:cNvSpPr txBox="1"/>
           <p:nvPr/>
         </p:nvSpPr>
@@ -3729,7 +3755,7 @@
       </p:sp>
       <p:sp>
         <p:nvSpPr>
-          <p:cNvPr id="12" name="Rectangle 11"/>
+          <p:cNvPr id="13" name="Rectangle 12"/>
           <p:cNvSpPr/>
           <p:nvPr/>
         </p:nvSpPr>
@@ -3772,7 +3798,7 @@
       </p:sp>
       <p:sp>
         <p:nvSpPr>
-          <p:cNvPr id="13" name="Rectangle 12"/>
+          <p:cNvPr id="14" name="Rectangle 13"/>
           <p:cNvSpPr/>
           <p:nvPr/>
         </p:nvSpPr>
@@ -3813,7 +3839,7 @@
       </p:sp>
       <p:sp>
         <p:nvSpPr>
-          <p:cNvPr id="14" name="Rectangle 13"/>
+          <p:cNvPr id="15" name="Rectangle 14"/>
           <p:cNvSpPr/>
           <p:nvPr/>
         </p:nvSpPr>
@@ -3854,7 +3880,7 @@
       </p:sp>
       <p:sp>
         <p:nvSpPr>
-          <p:cNvPr id="15" name="TextBox 14"/>
+          <p:cNvPr id="16" name="TextBox 15"/>
           <p:cNvSpPr txBox="1"/>
           <p:nvPr/>
         </p:nvSpPr>
@@ -3896,7 +3922,7 @@
       </p:sp>
       <p:sp>
         <p:nvSpPr>
-          <p:cNvPr id="16" name="TextBox 15"/>
+          <p:cNvPr id="17" name="TextBox 16"/>
           <p:cNvSpPr txBox="1"/>
           <p:nvPr/>
         </p:nvSpPr>
@@ -3976,7 +4002,7 @@
       </p:sp>
       <p:sp>
         <p:nvSpPr>
-          <p:cNvPr id="17" name="Rectangle 16"/>
+          <p:cNvPr id="18" name="Rectangle 17"/>
           <p:cNvSpPr/>
           <p:nvPr/>
         </p:nvSpPr>
@@ -4019,7 +4045,7 @@
       </p:sp>
       <p:sp>
         <p:nvSpPr>
-          <p:cNvPr id="18" name="Rectangle 17"/>
+          <p:cNvPr id="19" name="Rectangle 18"/>
           <p:cNvSpPr/>
           <p:nvPr/>
         </p:nvSpPr>
@@ -4060,7 +4086,7 @@
       </p:sp>
       <p:sp>
         <p:nvSpPr>
-          <p:cNvPr id="19" name="Rectangle 18"/>
+          <p:cNvPr id="20" name="Rectangle 19"/>
           <p:cNvSpPr/>
           <p:nvPr/>
         </p:nvSpPr>
@@ -4101,7 +4127,7 @@
       </p:sp>
       <p:sp>
         <p:nvSpPr>
-          <p:cNvPr id="20" name="TextBox 19"/>
+          <p:cNvPr id="21" name="TextBox 20"/>
           <p:cNvSpPr txBox="1"/>
           <p:nvPr/>
         </p:nvSpPr>
@@ -4143,7 +4169,7 @@
       </p:sp>
       <p:sp>
         <p:nvSpPr>
-          <p:cNvPr id="21" name="TextBox 20"/>
+          <p:cNvPr id="22" name="TextBox 21"/>
           <p:cNvSpPr txBox="1"/>
           <p:nvPr/>
         </p:nvSpPr>
@@ -4223,7 +4249,7 @@
       </p:sp>
       <p:sp>
         <p:nvSpPr>
-          <p:cNvPr id="22" name="Rectangle 21"/>
+          <p:cNvPr id="23" name="Rectangle 22"/>
           <p:cNvSpPr/>
           <p:nvPr/>
         </p:nvSpPr>
@@ -4266,7 +4292,7 @@
       </p:sp>
       <p:sp>
         <p:nvSpPr>
-          <p:cNvPr id="23" name="Rectangle 22"/>
+          <p:cNvPr id="24" name="Rectangle 23"/>
           <p:cNvSpPr/>
           <p:nvPr/>
         </p:nvSpPr>
@@ -4307,7 +4333,7 @@
       </p:sp>
       <p:sp>
         <p:nvSpPr>
-          <p:cNvPr id="24" name="Rectangle 23"/>
+          <p:cNvPr id="25" name="Rectangle 24"/>
           <p:cNvSpPr/>
           <p:nvPr/>
         </p:nvSpPr>
@@ -4348,7 +4374,7 @@
       </p:sp>
       <p:sp>
         <p:nvSpPr>
-          <p:cNvPr id="25" name="TextBox 24"/>
+          <p:cNvPr id="26" name="TextBox 25"/>
           <p:cNvSpPr txBox="1"/>
           <p:nvPr/>
         </p:nvSpPr>
@@ -4390,7 +4416,7 @@
       </p:sp>
       <p:sp>
         <p:nvSpPr>
-          <p:cNvPr id="26" name="TextBox 25"/>
+          <p:cNvPr id="27" name="TextBox 26"/>
           <p:cNvSpPr txBox="1"/>
           <p:nvPr/>
         </p:nvSpPr>
@@ -4470,7 +4496,7 @@
       </p:sp>
       <p:sp>
         <p:nvSpPr>
-          <p:cNvPr id="27" name="Rectangle 26"/>
+          <p:cNvPr id="28" name="Rectangle 27"/>
           <p:cNvSpPr/>
           <p:nvPr/>
         </p:nvSpPr>
@@ -4513,7 +4539,7 @@
       </p:sp>
       <p:sp>
         <p:nvSpPr>
-          <p:cNvPr id="28" name="Rectangle 27"/>
+          <p:cNvPr id="29" name="Rectangle 28"/>
           <p:cNvSpPr/>
           <p:nvPr/>
         </p:nvSpPr>
@@ -4554,7 +4580,7 @@
       </p:sp>
       <p:sp>
         <p:nvSpPr>
-          <p:cNvPr id="29" name="Rectangle 28"/>
+          <p:cNvPr id="30" name="Rectangle 29"/>
           <p:cNvSpPr/>
           <p:nvPr/>
         </p:nvSpPr>
@@ -4595,7 +4621,7 @@
       </p:sp>
       <p:sp>
         <p:nvSpPr>
-          <p:cNvPr id="30" name="TextBox 29"/>
+          <p:cNvPr id="31" name="TextBox 30"/>
           <p:cNvSpPr txBox="1"/>
           <p:nvPr/>
         </p:nvSpPr>
@@ -4637,7 +4663,7 @@
       </p:sp>
       <p:sp>
         <p:nvSpPr>
-          <p:cNvPr id="31" name="TextBox 30"/>
+          <p:cNvPr id="32" name="TextBox 31"/>
           <p:cNvSpPr txBox="1"/>
           <p:nvPr/>
         </p:nvSpPr>
@@ -4717,7 +4743,7 @@
       </p:sp>
       <p:sp>
         <p:nvSpPr>
-          <p:cNvPr id="32" name="Rectangle 31"/>
+          <p:cNvPr id="33" name="Rectangle 32"/>
           <p:cNvSpPr/>
           <p:nvPr/>
         </p:nvSpPr>
@@ -4760,7 +4786,7 @@
       </p:sp>
       <p:sp>
         <p:nvSpPr>
-          <p:cNvPr id="33" name="Rectangle 32"/>
+          <p:cNvPr id="34" name="Rectangle 33"/>
           <p:cNvSpPr/>
           <p:nvPr/>
         </p:nvSpPr>
@@ -4801,7 +4827,7 @@
       </p:sp>
       <p:sp>
         <p:nvSpPr>
-          <p:cNvPr id="34" name="Rectangle 33"/>
+          <p:cNvPr id="35" name="Rectangle 34"/>
           <p:cNvSpPr/>
           <p:nvPr/>
         </p:nvSpPr>
@@ -4842,7 +4868,7 @@
       </p:sp>
       <p:sp>
         <p:nvSpPr>
-          <p:cNvPr id="35" name="TextBox 34"/>
+          <p:cNvPr id="36" name="TextBox 35"/>
           <p:cNvSpPr txBox="1"/>
           <p:nvPr/>
         </p:nvSpPr>
@@ -4884,7 +4910,7 @@
       </p:sp>
       <p:sp>
         <p:nvSpPr>
-          <p:cNvPr id="36" name="TextBox 35"/>
+          <p:cNvPr id="37" name="TextBox 36"/>
           <p:cNvSpPr txBox="1"/>
           <p:nvPr/>
         </p:nvSpPr>
@@ -4964,7 +4990,7 @@
       </p:sp>
       <p:sp>
         <p:nvSpPr>
-          <p:cNvPr id="37" name="Rectangle 36"/>
+          <p:cNvPr id="38" name="Rectangle 37"/>
           <p:cNvSpPr/>
           <p:nvPr/>
         </p:nvSpPr>
@@ -5007,7 +5033,7 @@
       </p:sp>
       <p:sp>
         <p:nvSpPr>
-          <p:cNvPr id="38" name="Rectangle 37"/>
+          <p:cNvPr id="39" name="Rectangle 38"/>
           <p:cNvSpPr/>
           <p:nvPr/>
         </p:nvSpPr>
@@ -5048,7 +5074,7 @@
       </p:sp>
       <p:sp>
         <p:nvSpPr>
-          <p:cNvPr id="39" name="Rectangle 38"/>
+          <p:cNvPr id="40" name="Rectangle 39"/>
           <p:cNvSpPr/>
           <p:nvPr/>
         </p:nvSpPr>
@@ -5089,7 +5115,7 @@
       </p:sp>
       <p:sp>
         <p:nvSpPr>
-          <p:cNvPr id="40" name="TextBox 39"/>
+          <p:cNvPr id="41" name="TextBox 40"/>
           <p:cNvSpPr txBox="1"/>
           <p:nvPr/>
         </p:nvSpPr>
@@ -5131,7 +5157,7 @@
       </p:sp>
       <p:sp>
         <p:nvSpPr>
-          <p:cNvPr id="41" name="TextBox 40"/>
+          <p:cNvPr id="42" name="TextBox 41"/>
           <p:cNvSpPr txBox="1"/>
           <p:nvPr/>
         </p:nvSpPr>
@@ -5235,9 +5261,35 @@
         <p:nvPr/>
       </p:nvGrpSpPr>
       <p:grpSpPr/>
-      <p:sp>
-        <p:nvSpPr>
-          <p:cNvPr id="2" name="Rectangle 1"/>
+      <p:pic>
+        <p:nvPicPr>
+          <p:cNvPr id="2" name="Picture 1" descr="bg-p2.png"/>
+          <p:cNvPicPr>
+            <a:picLocks noChangeAspect="1"/>
+          </p:cNvPicPr>
+          <p:nvPr/>
+        </p:nvPicPr>
+        <p:blipFill>
+          <a:blip r:embed="rId2">
+            <a:alphaModFix amt="80000"/>
+          </a:blip>
+          <a:stretch>
+            <a:fillRect/>
+          </a:stretch>
+        </p:blipFill>
+        <p:spPr>
+          <a:xfrm>
+            <a:off x="0" y="0"/>
+            <a:ext cx="7556399" cy="10692000"/>
+          </a:xfrm>
+          <a:prstGeom prst="rect">
+            <a:avLst/>
+          </a:prstGeom>
+        </p:spPr>
+      </p:pic>
+      <p:sp>
+        <p:nvSpPr>
+          <p:cNvPr id="3" name="Rectangle 2"/>
           <p:cNvSpPr/>
           <p:nvPr/>
         </p:nvSpPr>
@@ -5280,7 +5332,7 @@
       </p:sp>
       <p:sp>
         <p:nvSpPr>
-          <p:cNvPr id="3" name="Rectangle 2"/>
+          <p:cNvPr id="4" name="Rectangle 3"/>
           <p:cNvSpPr/>
           <p:nvPr/>
         </p:nvSpPr>
@@ -5321,7 +5373,7 @@
       </p:sp>
       <p:sp>
         <p:nvSpPr>
-          <p:cNvPr id="4" name="TextBox 3"/>
+          <p:cNvPr id="5" name="TextBox 4"/>
           <p:cNvSpPr txBox="1"/>
           <p:nvPr/>
         </p:nvSpPr>
@@ -5363,7 +5415,7 @@
       </p:sp>
       <p:sp>
         <p:nvSpPr>
-          <p:cNvPr id="5" name="Rectangle 4"/>
+          <p:cNvPr id="6" name="Rectangle 5"/>
           <p:cNvSpPr/>
           <p:nvPr/>
         </p:nvSpPr>
@@ -5404,7 +5456,7 @@
       </p:sp>
       <p:sp>
         <p:nvSpPr>
-          <p:cNvPr id="6" name="TextBox 5"/>
+          <p:cNvPr id="7" name="TextBox 6"/>
           <p:cNvSpPr txBox="1"/>
           <p:nvPr/>
         </p:nvSpPr>
@@ -5531,7 +5583,7 @@
       </p:sp>
       <p:sp>
         <p:nvSpPr>
-          <p:cNvPr id="7" name="Rectangle 6"/>
+          <p:cNvPr id="8" name="Rectangle 7"/>
           <p:cNvSpPr/>
           <p:nvPr/>
         </p:nvSpPr>
@@ -5572,7 +5624,7 @@
       </p:sp>
       <p:sp>
         <p:nvSpPr>
-          <p:cNvPr id="8" name="TextBox 7"/>
+          <p:cNvPr id="9" name="TextBox 8"/>
           <p:cNvSpPr txBox="1"/>
           <p:nvPr/>
         </p:nvSpPr>
@@ -5699,7 +5751,7 @@
       </p:sp>
       <p:sp>
         <p:nvSpPr>
-          <p:cNvPr id="9" name="Rectangle 8"/>
+          <p:cNvPr id="10" name="Rectangle 9"/>
           <p:cNvSpPr/>
           <p:nvPr/>
         </p:nvSpPr>
@@ -5740,7 +5792,7 @@
       </p:sp>
       <p:sp>
         <p:nvSpPr>
-          <p:cNvPr id="10" name="TextBox 9"/>
+          <p:cNvPr id="11" name="TextBox 10"/>
           <p:cNvSpPr txBox="1"/>
           <p:nvPr/>
         </p:nvSpPr>
@@ -5867,7 +5919,7 @@
       </p:sp>
       <p:sp>
         <p:nvSpPr>
-          <p:cNvPr id="11" name="Rectangle 10"/>
+          <p:cNvPr id="12" name="Rectangle 11"/>
           <p:cNvSpPr/>
           <p:nvPr/>
         </p:nvSpPr>
@@ -5908,7 +5960,7 @@
       </p:sp>
       <p:sp>
         <p:nvSpPr>
-          <p:cNvPr id="12" name="TextBox 11"/>
+          <p:cNvPr id="13" name="TextBox 12"/>
           <p:cNvSpPr txBox="1"/>
           <p:nvPr/>
         </p:nvSpPr>

--- a/assets/fiches/E6-fiche-1h.pptx
+++ b/assets/fiches/E6-fiche-1h.pptx
@@ -3084,9 +3084,12 @@
   <p:cSld>
     <p:bg>
       <p:bgPr>
-        <a:solidFill>
-          <a:srgbClr val="FFFFFF"/>
-        </a:solidFill>
+        <a:blipFill>
+          <a:blip r:embed="rId2"/>
+          <a:stretch>
+            <a:fillRect/>
+          </a:stretch>
+        </a:blipFill>
         <a:effectLst/>
       </p:bgPr>
     </p:bg>
@@ -3097,35 +3100,9 @@
         <p:nvPr/>
       </p:nvGrpSpPr>
       <p:grpSpPr/>
-      <p:pic>
-        <p:nvPicPr>
-          <p:cNvPr id="2" name="Picture 1" descr="bg-p1.png"/>
-          <p:cNvPicPr>
-            <a:picLocks noChangeAspect="1"/>
-          </p:cNvPicPr>
-          <p:nvPr/>
-        </p:nvPicPr>
-        <p:blipFill>
-          <a:blip r:embed="rId2">
-            <a:alphaModFix amt="80000"/>
-          </a:blip>
-          <a:stretch>
-            <a:fillRect/>
-          </a:stretch>
-        </p:blipFill>
-        <p:spPr>
-          <a:xfrm>
-            <a:off x="0" y="0"/>
-            <a:ext cx="7556399" cy="10692000"/>
-          </a:xfrm>
-          <a:prstGeom prst="rect">
-            <a:avLst/>
-          </a:prstGeom>
-        </p:spPr>
-      </p:pic>
-      <p:sp>
-        <p:nvSpPr>
-          <p:cNvPr id="3" name="TextBox 2"/>
+      <p:sp>
+        <p:nvSpPr>
+          <p:cNvPr id="2" name="TextBox 1"/>
           <p:cNvSpPr txBox="1"/>
           <p:nvPr/>
         </p:nvSpPr>
@@ -3186,7 +3163,7 @@
       </p:sp>
       <p:sp>
         <p:nvSpPr>
-          <p:cNvPr id="4" name="Rectangle 3"/>
+          <p:cNvPr id="3" name="Rectangle 2"/>
           <p:cNvSpPr/>
           <p:nvPr/>
         </p:nvSpPr>
@@ -3229,7 +3206,7 @@
       </p:sp>
       <p:sp>
         <p:nvSpPr>
-          <p:cNvPr id="5" name="TextBox 4"/>
+          <p:cNvPr id="4" name="TextBox 3"/>
           <p:cNvSpPr txBox="1"/>
           <p:nvPr/>
         </p:nvSpPr>
@@ -3347,7 +3324,7 @@
       </p:sp>
       <p:sp>
         <p:nvSpPr>
-          <p:cNvPr id="6" name="Rectangle 5"/>
+          <p:cNvPr id="5" name="Rectangle 4"/>
           <p:cNvSpPr/>
           <p:nvPr/>
         </p:nvSpPr>
@@ -3390,7 +3367,7 @@
       </p:sp>
       <p:sp>
         <p:nvSpPr>
-          <p:cNvPr id="7" name="TextBox 6"/>
+          <p:cNvPr id="6" name="TextBox 5"/>
           <p:cNvSpPr txBox="1"/>
           <p:nvPr/>
         </p:nvSpPr>
@@ -3508,7 +3485,7 @@
       </p:sp>
       <p:sp>
         <p:nvSpPr>
-          <p:cNvPr id="8" name="Rectangle 7"/>
+          <p:cNvPr id="7" name="Rectangle 6"/>
           <p:cNvSpPr/>
           <p:nvPr/>
         </p:nvSpPr>
@@ -3551,7 +3528,7 @@
       </p:sp>
       <p:sp>
         <p:nvSpPr>
-          <p:cNvPr id="9" name="Rectangle 8"/>
+          <p:cNvPr id="8" name="Rectangle 7"/>
           <p:cNvSpPr/>
           <p:nvPr/>
         </p:nvSpPr>
@@ -3592,7 +3569,7 @@
       </p:sp>
       <p:sp>
         <p:nvSpPr>
-          <p:cNvPr id="10" name="Rectangle 9"/>
+          <p:cNvPr id="9" name="Rectangle 8"/>
           <p:cNvSpPr/>
           <p:nvPr/>
         </p:nvSpPr>
@@ -3633,7 +3610,7 @@
       </p:sp>
       <p:sp>
         <p:nvSpPr>
-          <p:cNvPr id="11" name="TextBox 10"/>
+          <p:cNvPr id="10" name="TextBox 9"/>
           <p:cNvSpPr txBox="1"/>
           <p:nvPr/>
         </p:nvSpPr>
@@ -3675,7 +3652,7 @@
       </p:sp>
       <p:sp>
         <p:nvSpPr>
-          <p:cNvPr id="12" name="TextBox 11"/>
+          <p:cNvPr id="11" name="TextBox 10"/>
           <p:cNvSpPr txBox="1"/>
           <p:nvPr/>
         </p:nvSpPr>
@@ -3755,7 +3732,7 @@
       </p:sp>
       <p:sp>
         <p:nvSpPr>
-          <p:cNvPr id="13" name="Rectangle 12"/>
+          <p:cNvPr id="12" name="Rectangle 11"/>
           <p:cNvSpPr/>
           <p:nvPr/>
         </p:nvSpPr>
@@ -3798,7 +3775,7 @@
       </p:sp>
       <p:sp>
         <p:nvSpPr>
-          <p:cNvPr id="14" name="Rectangle 13"/>
+          <p:cNvPr id="13" name="Rectangle 12"/>
           <p:cNvSpPr/>
           <p:nvPr/>
         </p:nvSpPr>
@@ -3839,7 +3816,7 @@
       </p:sp>
       <p:sp>
         <p:nvSpPr>
-          <p:cNvPr id="15" name="Rectangle 14"/>
+          <p:cNvPr id="14" name="Rectangle 13"/>
           <p:cNvSpPr/>
           <p:nvPr/>
         </p:nvSpPr>
@@ -3880,7 +3857,7 @@
       </p:sp>
       <p:sp>
         <p:nvSpPr>
-          <p:cNvPr id="16" name="TextBox 15"/>
+          <p:cNvPr id="15" name="TextBox 14"/>
           <p:cNvSpPr txBox="1"/>
           <p:nvPr/>
         </p:nvSpPr>
@@ -3922,7 +3899,7 @@
       </p:sp>
       <p:sp>
         <p:nvSpPr>
-          <p:cNvPr id="17" name="TextBox 16"/>
+          <p:cNvPr id="16" name="TextBox 15"/>
           <p:cNvSpPr txBox="1"/>
           <p:nvPr/>
         </p:nvSpPr>
@@ -4002,7 +3979,7 @@
       </p:sp>
       <p:sp>
         <p:nvSpPr>
-          <p:cNvPr id="18" name="Rectangle 17"/>
+          <p:cNvPr id="17" name="Rectangle 16"/>
           <p:cNvSpPr/>
           <p:nvPr/>
         </p:nvSpPr>
@@ -4045,7 +4022,7 @@
       </p:sp>
       <p:sp>
         <p:nvSpPr>
-          <p:cNvPr id="19" name="Rectangle 18"/>
+          <p:cNvPr id="18" name="Rectangle 17"/>
           <p:cNvSpPr/>
           <p:nvPr/>
         </p:nvSpPr>
@@ -4086,7 +4063,7 @@
       </p:sp>
       <p:sp>
         <p:nvSpPr>
-          <p:cNvPr id="20" name="Rectangle 19"/>
+          <p:cNvPr id="19" name="Rectangle 18"/>
           <p:cNvSpPr/>
           <p:nvPr/>
         </p:nvSpPr>
@@ -4127,7 +4104,7 @@
       </p:sp>
       <p:sp>
         <p:nvSpPr>
-          <p:cNvPr id="21" name="TextBox 20"/>
+          <p:cNvPr id="20" name="TextBox 19"/>
           <p:cNvSpPr txBox="1"/>
           <p:nvPr/>
         </p:nvSpPr>
@@ -4169,7 +4146,7 @@
       </p:sp>
       <p:sp>
         <p:nvSpPr>
-          <p:cNvPr id="22" name="TextBox 21"/>
+          <p:cNvPr id="21" name="TextBox 20"/>
           <p:cNvSpPr txBox="1"/>
           <p:nvPr/>
         </p:nvSpPr>
@@ -4249,7 +4226,7 @@
       </p:sp>
       <p:sp>
         <p:nvSpPr>
-          <p:cNvPr id="23" name="Rectangle 22"/>
+          <p:cNvPr id="22" name="Rectangle 21"/>
           <p:cNvSpPr/>
           <p:nvPr/>
         </p:nvSpPr>
@@ -4292,7 +4269,7 @@
       </p:sp>
       <p:sp>
         <p:nvSpPr>
-          <p:cNvPr id="24" name="Rectangle 23"/>
+          <p:cNvPr id="23" name="Rectangle 22"/>
           <p:cNvSpPr/>
           <p:nvPr/>
         </p:nvSpPr>
@@ -4333,7 +4310,7 @@
       </p:sp>
       <p:sp>
         <p:nvSpPr>
-          <p:cNvPr id="25" name="Rectangle 24"/>
+          <p:cNvPr id="24" name="Rectangle 23"/>
           <p:cNvSpPr/>
           <p:nvPr/>
         </p:nvSpPr>
@@ -4374,7 +4351,7 @@
       </p:sp>
       <p:sp>
         <p:nvSpPr>
-          <p:cNvPr id="26" name="TextBox 25"/>
+          <p:cNvPr id="25" name="TextBox 24"/>
           <p:cNvSpPr txBox="1"/>
           <p:nvPr/>
         </p:nvSpPr>
@@ -4416,7 +4393,7 @@
       </p:sp>
       <p:sp>
         <p:nvSpPr>
-          <p:cNvPr id="27" name="TextBox 26"/>
+          <p:cNvPr id="26" name="TextBox 25"/>
           <p:cNvSpPr txBox="1"/>
           <p:nvPr/>
         </p:nvSpPr>
@@ -4496,7 +4473,7 @@
       </p:sp>
       <p:sp>
         <p:nvSpPr>
-          <p:cNvPr id="28" name="Rectangle 27"/>
+          <p:cNvPr id="27" name="Rectangle 26"/>
           <p:cNvSpPr/>
           <p:nvPr/>
         </p:nvSpPr>
@@ -4539,7 +4516,7 @@
       </p:sp>
       <p:sp>
         <p:nvSpPr>
-          <p:cNvPr id="29" name="Rectangle 28"/>
+          <p:cNvPr id="28" name="Rectangle 27"/>
           <p:cNvSpPr/>
           <p:nvPr/>
         </p:nvSpPr>
@@ -4580,7 +4557,7 @@
       </p:sp>
       <p:sp>
         <p:nvSpPr>
-          <p:cNvPr id="30" name="Rectangle 29"/>
+          <p:cNvPr id="29" name="Rectangle 28"/>
           <p:cNvSpPr/>
           <p:nvPr/>
         </p:nvSpPr>
@@ -4621,7 +4598,7 @@
       </p:sp>
       <p:sp>
         <p:nvSpPr>
-          <p:cNvPr id="31" name="TextBox 30"/>
+          <p:cNvPr id="30" name="TextBox 29"/>
           <p:cNvSpPr txBox="1"/>
           <p:nvPr/>
         </p:nvSpPr>
@@ -4663,7 +4640,7 @@
       </p:sp>
       <p:sp>
         <p:nvSpPr>
-          <p:cNvPr id="32" name="TextBox 31"/>
+          <p:cNvPr id="31" name="TextBox 30"/>
           <p:cNvSpPr txBox="1"/>
           <p:nvPr/>
         </p:nvSpPr>
@@ -4743,7 +4720,7 @@
       </p:sp>
       <p:sp>
         <p:nvSpPr>
-          <p:cNvPr id="33" name="Rectangle 32"/>
+          <p:cNvPr id="32" name="Rectangle 31"/>
           <p:cNvSpPr/>
           <p:nvPr/>
         </p:nvSpPr>
@@ -4786,7 +4763,7 @@
       </p:sp>
       <p:sp>
         <p:nvSpPr>
-          <p:cNvPr id="34" name="Rectangle 33"/>
+          <p:cNvPr id="33" name="Rectangle 32"/>
           <p:cNvSpPr/>
           <p:nvPr/>
         </p:nvSpPr>
@@ -4827,7 +4804,7 @@
       </p:sp>
       <p:sp>
         <p:nvSpPr>
-          <p:cNvPr id="35" name="Rectangle 34"/>
+          <p:cNvPr id="34" name="Rectangle 33"/>
           <p:cNvSpPr/>
           <p:nvPr/>
         </p:nvSpPr>
@@ -4868,7 +4845,7 @@
       </p:sp>
       <p:sp>
         <p:nvSpPr>
-          <p:cNvPr id="36" name="TextBox 35"/>
+          <p:cNvPr id="35" name="TextBox 34"/>
           <p:cNvSpPr txBox="1"/>
           <p:nvPr/>
         </p:nvSpPr>
@@ -4910,7 +4887,7 @@
       </p:sp>
       <p:sp>
         <p:nvSpPr>
-          <p:cNvPr id="37" name="TextBox 36"/>
+          <p:cNvPr id="36" name="TextBox 35"/>
           <p:cNvSpPr txBox="1"/>
           <p:nvPr/>
         </p:nvSpPr>
@@ -4990,7 +4967,7 @@
       </p:sp>
       <p:sp>
         <p:nvSpPr>
-          <p:cNvPr id="38" name="Rectangle 37"/>
+          <p:cNvPr id="37" name="Rectangle 36"/>
           <p:cNvSpPr/>
           <p:nvPr/>
         </p:nvSpPr>
@@ -5033,7 +5010,7 @@
       </p:sp>
       <p:sp>
         <p:nvSpPr>
-          <p:cNvPr id="39" name="Rectangle 38"/>
+          <p:cNvPr id="38" name="Rectangle 37"/>
           <p:cNvSpPr/>
           <p:nvPr/>
         </p:nvSpPr>
@@ -5074,7 +5051,7 @@
       </p:sp>
       <p:sp>
         <p:nvSpPr>
-          <p:cNvPr id="40" name="Rectangle 39"/>
+          <p:cNvPr id="39" name="Rectangle 38"/>
           <p:cNvSpPr/>
           <p:nvPr/>
         </p:nvSpPr>
@@ -5115,7 +5092,7 @@
       </p:sp>
       <p:sp>
         <p:nvSpPr>
-          <p:cNvPr id="41" name="TextBox 40"/>
+          <p:cNvPr id="40" name="TextBox 39"/>
           <p:cNvSpPr txBox="1"/>
           <p:nvPr/>
         </p:nvSpPr>
@@ -5157,7 +5134,7 @@
       </p:sp>
       <p:sp>
         <p:nvSpPr>
-          <p:cNvPr id="42" name="TextBox 41"/>
+          <p:cNvPr id="41" name="TextBox 40"/>
           <p:cNvSpPr txBox="1"/>
           <p:nvPr/>
         </p:nvSpPr>
@@ -5248,9 +5225,12 @@
   <p:cSld>
     <p:bg>
       <p:bgPr>
-        <a:solidFill>
-          <a:srgbClr val="FFFFFF"/>
-        </a:solidFill>
+        <a:blipFill>
+          <a:blip r:embed="rId2"/>
+          <a:stretch>
+            <a:fillRect/>
+          </a:stretch>
+        </a:blipFill>
         <a:effectLst/>
       </p:bgPr>
     </p:bg>
@@ -5261,35 +5241,9 @@
         <p:nvPr/>
       </p:nvGrpSpPr>
       <p:grpSpPr/>
-      <p:pic>
-        <p:nvPicPr>
-          <p:cNvPr id="2" name="Picture 1" descr="bg-p2.png"/>
-          <p:cNvPicPr>
-            <a:picLocks noChangeAspect="1"/>
-          </p:cNvPicPr>
-          <p:nvPr/>
-        </p:nvPicPr>
-        <p:blipFill>
-          <a:blip r:embed="rId2">
-            <a:alphaModFix amt="80000"/>
-          </a:blip>
-          <a:stretch>
-            <a:fillRect/>
-          </a:stretch>
-        </p:blipFill>
-        <p:spPr>
-          <a:xfrm>
-            <a:off x="0" y="0"/>
-            <a:ext cx="7556399" cy="10692000"/>
-          </a:xfrm>
-          <a:prstGeom prst="rect">
-            <a:avLst/>
-          </a:prstGeom>
-        </p:spPr>
-      </p:pic>
-      <p:sp>
-        <p:nvSpPr>
-          <p:cNvPr id="3" name="Rectangle 2"/>
+      <p:sp>
+        <p:nvSpPr>
+          <p:cNvPr id="2" name="Rectangle 1"/>
           <p:cNvSpPr/>
           <p:nvPr/>
         </p:nvSpPr>
@@ -5332,7 +5286,7 @@
       </p:sp>
       <p:sp>
         <p:nvSpPr>
-          <p:cNvPr id="4" name="Rectangle 3"/>
+          <p:cNvPr id="3" name="Rectangle 2"/>
           <p:cNvSpPr/>
           <p:nvPr/>
         </p:nvSpPr>
@@ -5373,7 +5327,7 @@
       </p:sp>
       <p:sp>
         <p:nvSpPr>
-          <p:cNvPr id="5" name="TextBox 4"/>
+          <p:cNvPr id="4" name="TextBox 3"/>
           <p:cNvSpPr txBox="1"/>
           <p:nvPr/>
         </p:nvSpPr>
@@ -5415,7 +5369,7 @@
       </p:sp>
       <p:sp>
         <p:nvSpPr>
-          <p:cNvPr id="6" name="Rectangle 5"/>
+          <p:cNvPr id="5" name="Rectangle 4"/>
           <p:cNvSpPr/>
           <p:nvPr/>
         </p:nvSpPr>
@@ -5456,7 +5410,7 @@
       </p:sp>
       <p:sp>
         <p:nvSpPr>
-          <p:cNvPr id="7" name="TextBox 6"/>
+          <p:cNvPr id="6" name="TextBox 5"/>
           <p:cNvSpPr txBox="1"/>
           <p:nvPr/>
         </p:nvSpPr>
@@ -5583,7 +5537,7 @@
       </p:sp>
       <p:sp>
         <p:nvSpPr>
-          <p:cNvPr id="8" name="Rectangle 7"/>
+          <p:cNvPr id="7" name="Rectangle 6"/>
           <p:cNvSpPr/>
           <p:nvPr/>
         </p:nvSpPr>
@@ -5624,7 +5578,7 @@
       </p:sp>
       <p:sp>
         <p:nvSpPr>
-          <p:cNvPr id="9" name="TextBox 8"/>
+          <p:cNvPr id="8" name="TextBox 7"/>
           <p:cNvSpPr txBox="1"/>
           <p:nvPr/>
         </p:nvSpPr>
@@ -5751,7 +5705,7 @@
       </p:sp>
       <p:sp>
         <p:nvSpPr>
-          <p:cNvPr id="10" name="Rectangle 9"/>
+          <p:cNvPr id="9" name="Rectangle 8"/>
           <p:cNvSpPr/>
           <p:nvPr/>
         </p:nvSpPr>
@@ -5792,7 +5746,7 @@
       </p:sp>
       <p:sp>
         <p:nvSpPr>
-          <p:cNvPr id="11" name="TextBox 10"/>
+          <p:cNvPr id="10" name="TextBox 9"/>
           <p:cNvSpPr txBox="1"/>
           <p:nvPr/>
         </p:nvSpPr>
@@ -5919,7 +5873,7 @@
       </p:sp>
       <p:sp>
         <p:nvSpPr>
-          <p:cNvPr id="12" name="Rectangle 11"/>
+          <p:cNvPr id="11" name="Rectangle 10"/>
           <p:cNvSpPr/>
           <p:nvPr/>
         </p:nvSpPr>
@@ -5960,7 +5914,7 @@
       </p:sp>
       <p:sp>
         <p:nvSpPr>
-          <p:cNvPr id="13" name="TextBox 12"/>
+          <p:cNvPr id="12" name="TextBox 11"/>
           <p:cNvSpPr txBox="1"/>
           <p:nvPr/>
         </p:nvSpPr>
